--- a/ゲーム案2.pptx
+++ b/ゲーム案2.pptx
@@ -9,6 +9,7 @@
     <p:sldId id="258" r:id="rId3"/>
     <p:sldId id="260" r:id="rId4"/>
     <p:sldId id="259" r:id="rId5"/>
+    <p:sldId id="261" r:id="rId6"/>
   </p:sldIdLst>
   <p:sldSz cx="12192000" cy="6858000"/>
   <p:notesSz cx="6858000" cy="9144000"/>
@@ -107,6 +108,24 @@
       </a:defRPr>
     </a:lvl9pPr>
   </p:defaultTextStyle>
+  <p:extLst>
+    <p:ext uri="{521415D9-36F7-43E2-AB2F-B90AF26B5E84}">
+      <p14:sectionLst xmlns:p14="http://schemas.microsoft.com/office/powerpoint/2010/main">
+        <p14:section name="既定のセクション" id="{8CD7BC04-6BB5-42FA-A41A-2D3080EC27C1}">
+          <p14:sldIdLst>
+            <p14:sldId id="256"/>
+            <p14:sldId id="258"/>
+            <p14:sldId id="260"/>
+            <p14:sldId id="259"/>
+            <p14:sldId id="261"/>
+          </p14:sldIdLst>
+        </p14:section>
+      </p14:sectionLst>
+    </p:ext>
+    <p:ext uri="{EFAFB233-063F-42B5-8137-9DF3F51BA10A}">
+      <p15:sldGuideLst xmlns:p15="http://schemas.microsoft.com/office/powerpoint/2012/main"/>
+    </p:ext>
+  </p:extLst>
 </p:presentation>
 </file>
 
@@ -241,7 +260,7 @@
           <a:p>
             <a:fld id="{C3F489A1-ACCE-485D-AD66-9A2F97A4D007}" type="datetimeFigureOut">
               <a:rPr kumimoji="1" lang="ja-JP" altLang="en-US" smtClean="0"/>
-              <a:t>2025/10/6</a:t>
+              <a:t>2025/10/9</a:t>
             </a:fld>
             <a:endParaRPr kumimoji="1" lang="ja-JP" altLang="en-US"/>
           </a:p>
@@ -443,7 +462,7 @@
           <a:p>
             <a:fld id="{C3F489A1-ACCE-485D-AD66-9A2F97A4D007}" type="datetimeFigureOut">
               <a:rPr kumimoji="1" lang="ja-JP" altLang="en-US" smtClean="0"/>
-              <a:t>2025/10/6</a:t>
+              <a:t>2025/10/9</a:t>
             </a:fld>
             <a:endParaRPr kumimoji="1" lang="ja-JP" altLang="en-US"/>
           </a:p>
@@ -655,7 +674,7 @@
           <a:p>
             <a:fld id="{C3F489A1-ACCE-485D-AD66-9A2F97A4D007}" type="datetimeFigureOut">
               <a:rPr kumimoji="1" lang="ja-JP" altLang="en-US" smtClean="0"/>
-              <a:t>2025/10/6</a:t>
+              <a:t>2025/10/9</a:t>
             </a:fld>
             <a:endParaRPr kumimoji="1" lang="ja-JP" altLang="en-US"/>
           </a:p>
@@ -857,7 +876,7 @@
           <a:p>
             <a:fld id="{C3F489A1-ACCE-485D-AD66-9A2F97A4D007}" type="datetimeFigureOut">
               <a:rPr kumimoji="1" lang="ja-JP" altLang="en-US" smtClean="0"/>
-              <a:t>2025/10/6</a:t>
+              <a:t>2025/10/9</a:t>
             </a:fld>
             <a:endParaRPr kumimoji="1" lang="ja-JP" altLang="en-US"/>
           </a:p>
@@ -1103,7 +1122,7 @@
           <a:p>
             <a:fld id="{C3F489A1-ACCE-485D-AD66-9A2F97A4D007}" type="datetimeFigureOut">
               <a:rPr kumimoji="1" lang="ja-JP" altLang="en-US" smtClean="0"/>
-              <a:t>2025/10/6</a:t>
+              <a:t>2025/10/9</a:t>
             </a:fld>
             <a:endParaRPr kumimoji="1" lang="ja-JP" altLang="en-US"/>
           </a:p>
@@ -1399,7 +1418,7 @@
           <a:p>
             <a:fld id="{C3F489A1-ACCE-485D-AD66-9A2F97A4D007}" type="datetimeFigureOut">
               <a:rPr kumimoji="1" lang="ja-JP" altLang="en-US" smtClean="0"/>
-              <a:t>2025/10/6</a:t>
+              <a:t>2025/10/9</a:t>
             </a:fld>
             <a:endParaRPr kumimoji="1" lang="ja-JP" altLang="en-US"/>
           </a:p>
@@ -1830,7 +1849,7 @@
           <a:p>
             <a:fld id="{C3F489A1-ACCE-485D-AD66-9A2F97A4D007}" type="datetimeFigureOut">
               <a:rPr kumimoji="1" lang="ja-JP" altLang="en-US" smtClean="0"/>
-              <a:t>2025/10/6</a:t>
+              <a:t>2025/10/9</a:t>
             </a:fld>
             <a:endParaRPr kumimoji="1" lang="ja-JP" altLang="en-US"/>
           </a:p>
@@ -1948,7 +1967,7 @@
           <a:p>
             <a:fld id="{C3F489A1-ACCE-485D-AD66-9A2F97A4D007}" type="datetimeFigureOut">
               <a:rPr kumimoji="1" lang="ja-JP" altLang="en-US" smtClean="0"/>
-              <a:t>2025/10/6</a:t>
+              <a:t>2025/10/9</a:t>
             </a:fld>
             <a:endParaRPr kumimoji="1" lang="ja-JP" altLang="en-US"/>
           </a:p>
@@ -2043,7 +2062,7 @@
           <a:p>
             <a:fld id="{C3F489A1-ACCE-485D-AD66-9A2F97A4D007}" type="datetimeFigureOut">
               <a:rPr kumimoji="1" lang="ja-JP" altLang="en-US" smtClean="0"/>
-              <a:t>2025/10/6</a:t>
+              <a:t>2025/10/9</a:t>
             </a:fld>
             <a:endParaRPr kumimoji="1" lang="ja-JP" altLang="en-US"/>
           </a:p>
@@ -2352,7 +2371,7 @@
           <a:p>
             <a:fld id="{C3F489A1-ACCE-485D-AD66-9A2F97A4D007}" type="datetimeFigureOut">
               <a:rPr kumimoji="1" lang="ja-JP" altLang="en-US" smtClean="0"/>
-              <a:t>2025/10/6</a:t>
+              <a:t>2025/10/9</a:t>
             </a:fld>
             <a:endParaRPr kumimoji="1" lang="ja-JP" altLang="en-US"/>
           </a:p>
@@ -2605,7 +2624,7 @@
           <a:p>
             <a:fld id="{C3F489A1-ACCE-485D-AD66-9A2F97A4D007}" type="datetimeFigureOut">
               <a:rPr kumimoji="1" lang="ja-JP" altLang="en-US" smtClean="0"/>
-              <a:t>2025/10/6</a:t>
+              <a:t>2025/10/9</a:t>
             </a:fld>
             <a:endParaRPr kumimoji="1" lang="ja-JP" altLang="en-US"/>
           </a:p>
@@ -2850,7 +2869,7 @@
           <a:p>
             <a:fld id="{C3F489A1-ACCE-485D-AD66-9A2F97A4D007}" type="datetimeFigureOut">
               <a:rPr kumimoji="1" lang="ja-JP" altLang="en-US" smtClean="0"/>
-              <a:t>2025/10/6</a:t>
+              <a:t>2025/10/9</a:t>
             </a:fld>
             <a:endParaRPr kumimoji="1" lang="ja-JP" altLang="en-US"/>
           </a:p>
@@ -3270,6 +3289,10 @@
           <a:bodyPr/>
           <a:lstStyle/>
           <a:p>
+            <a:r>
+              <a:rPr kumimoji="1" lang="ja-JP" altLang="en-US" dirty="0" smtClean="0"/>
+              <a:t>モンスターキャッチャー</a:t>
+            </a:r>
             <a:endParaRPr kumimoji="1" lang="ja-JP" altLang="en-US" dirty="0"/>
           </a:p>
         </p:txBody>
@@ -3289,7 +3312,15 @@
           <a:bodyPr/>
           <a:lstStyle/>
           <a:p>
-            <a:endParaRPr kumimoji="1" lang="ja-JP" altLang="en-US"/>
+            <a:r>
+              <a:rPr kumimoji="1" lang="ja-JP" altLang="en-US" dirty="0" smtClean="0"/>
+              <a:t>開発：</a:t>
+            </a:r>
+            <a:r>
+              <a:rPr kumimoji="1" lang="en-US" altLang="ja-JP" dirty="0" smtClean="0"/>
+              <a:t>UnrealEngine5</a:t>
+            </a:r>
+            <a:endParaRPr kumimoji="1" lang="ja-JP" altLang="en-US" dirty="0"/>
           </a:p>
         </p:txBody>
       </p:sp>
@@ -3303,6 +3334,13 @@
   <p:clrMapOvr>
     <a:masterClrMapping/>
   </p:clrMapOvr>
+  <p:timing>
+    <p:tnLst>
+      <p:par>
+        <p:cTn id="1" dur="indefinite" restart="never" nodeType="tmRoot"/>
+      </p:par>
+    </p:tnLst>
+  </p:timing>
 </p:sld>
 </file>
 
@@ -3373,21 +3411,23 @@
           <a:p>
             <a:r>
               <a:rPr lang="ja-JP" altLang="en-US" dirty="0" smtClean="0"/>
-              <a:t>投てき武器をつかいモンスターを弱らせロープで捕獲し納品、</a:t>
-            </a:r>
-            <a:endParaRPr lang="en-US" altLang="ja-JP" dirty="0" smtClean="0"/>
-          </a:p>
-          <a:p>
-            <a:pPr marL="0" indent="0">
-              <a:buNone/>
-            </a:pPr>
+              <a:t>投てき武器をつかいモンスターを弱らせロープで捕獲し</a:t>
+            </a:r>
+            <a:r>
+              <a:rPr lang="ja-JP" altLang="en-US" dirty="0" smtClean="0"/>
+              <a:t>納品</a:t>
+            </a:r>
             <a:r>
               <a:rPr lang="ja-JP" altLang="en-US" dirty="0"/>
-              <a:t> </a:t>
+              <a:t>、</a:t>
             </a:r>
             <a:r>
               <a:rPr lang="ja-JP" altLang="en-US" dirty="0" smtClean="0"/>
-              <a:t> 条件の数を納品できればステージクリア</a:t>
+              <a:t>条件</a:t>
+            </a:r>
+            <a:r>
+              <a:rPr lang="ja-JP" altLang="en-US" dirty="0" smtClean="0"/>
+              <a:t>の数を納品できればステージクリア</a:t>
             </a:r>
             <a:endParaRPr lang="en-US" altLang="ja-JP" dirty="0" smtClean="0"/>
           </a:p>
@@ -3400,25 +3440,15 @@
           <a:p>
             <a:r>
               <a:rPr lang="ja-JP" altLang="en-US" dirty="0" smtClean="0"/>
-              <a:t>クリア後報酬を獲得し、報酬を消費することによって</a:t>
-            </a:r>
-            <a:endParaRPr lang="en-US" altLang="ja-JP" dirty="0" smtClean="0"/>
-          </a:p>
-          <a:p>
-            <a:pPr marL="0" indent="0">
-              <a:buNone/>
-            </a:pPr>
-            <a:r>
-              <a:rPr lang="en-US" altLang="ja-JP" dirty="0"/>
-              <a:t> </a:t>
-            </a:r>
-            <a:r>
-              <a:rPr lang="en-US" altLang="ja-JP" dirty="0" smtClean="0"/>
-              <a:t> </a:t>
+              <a:t>クリア後報酬を獲得し、報酬を消費することに</a:t>
             </a:r>
             <a:r>
               <a:rPr lang="ja-JP" altLang="en-US" dirty="0" smtClean="0"/>
-              <a:t>スキルや投てき武器の強化を行える</a:t>
+              <a:t>よって　　　　スキル取得や</a:t>
+            </a:r>
+            <a:r>
+              <a:rPr lang="ja-JP" altLang="en-US" dirty="0" smtClean="0"/>
+              <a:t>投てき武器の強化を行える</a:t>
             </a:r>
             <a:endParaRPr lang="en-US" altLang="ja-JP" dirty="0" smtClean="0"/>
           </a:p>
@@ -3440,6 +3470,219 @@
   <p:clrMapOvr>
     <a:masterClrMapping/>
   </p:clrMapOvr>
+  <p:timing>
+    <p:tnLst>
+      <p:par>
+        <p:cTn id="1" dur="indefinite" restart="never" nodeType="tmRoot">
+          <p:childTnLst>
+            <p:seq concurrent="1" nextAc="seek">
+              <p:cTn id="2" dur="indefinite" nodeType="mainSeq">
+                <p:childTnLst>
+                  <p:par>
+                    <p:cTn id="3" fill="hold">
+                      <p:stCondLst>
+                        <p:cond delay="indefinite"/>
+                      </p:stCondLst>
+                      <p:childTnLst>
+                        <p:par>
+                          <p:cTn id="4" fill="hold">
+                            <p:stCondLst>
+                              <p:cond delay="0"/>
+                            </p:stCondLst>
+                            <p:childTnLst>
+                              <p:par>
+                                <p:cTn id="5" presetID="10" presetClass="entr" presetSubtype="0" fill="hold" nodeType="clickEffect">
+                                  <p:stCondLst>
+                                    <p:cond delay="0"/>
+                                  </p:stCondLst>
+                                  <p:childTnLst>
+                                    <p:set>
+                                      <p:cBhvr>
+                                        <p:cTn id="6" dur="1" fill="hold">
+                                          <p:stCondLst>
+                                            <p:cond delay="0"/>
+                                          </p:stCondLst>
+                                        </p:cTn>
+                                        <p:tgtEl>
+                                          <p:spTgt spid="3">
+                                            <p:txEl>
+                                              <p:pRg st="0" end="0"/>
+                                            </p:txEl>
+                                          </p:spTgt>
+                                        </p:tgtEl>
+                                        <p:attrNameLst>
+                                          <p:attrName>style.visibility</p:attrName>
+                                        </p:attrNameLst>
+                                      </p:cBhvr>
+                                      <p:to>
+                                        <p:strVal val="visible"/>
+                                      </p:to>
+                                    </p:set>
+                                    <p:animEffect transition="in" filter="fade">
+                                      <p:cBhvr>
+                                        <p:cTn id="7" dur="500"/>
+                                        <p:tgtEl>
+                                          <p:spTgt spid="3">
+                                            <p:txEl>
+                                              <p:pRg st="0" end="0"/>
+                                            </p:txEl>
+                                          </p:spTgt>
+                                        </p:tgtEl>
+                                      </p:cBhvr>
+                                    </p:animEffect>
+                                  </p:childTnLst>
+                                </p:cTn>
+                              </p:par>
+                            </p:childTnLst>
+                          </p:cTn>
+                        </p:par>
+                      </p:childTnLst>
+                    </p:cTn>
+                  </p:par>
+                  <p:par>
+                    <p:cTn id="8" fill="hold">
+                      <p:stCondLst>
+                        <p:cond delay="indefinite"/>
+                      </p:stCondLst>
+                      <p:childTnLst>
+                        <p:par>
+                          <p:cTn id="9" fill="hold">
+                            <p:stCondLst>
+                              <p:cond delay="0"/>
+                            </p:stCondLst>
+                            <p:childTnLst>
+                              <p:par>
+                                <p:cTn id="10" presetID="10" presetClass="entr" presetSubtype="0" fill="hold" nodeType="clickEffect">
+                                  <p:stCondLst>
+                                    <p:cond delay="0"/>
+                                  </p:stCondLst>
+                                  <p:childTnLst>
+                                    <p:set>
+                                      <p:cBhvr>
+                                        <p:cTn id="11" dur="1" fill="hold">
+                                          <p:stCondLst>
+                                            <p:cond delay="0"/>
+                                          </p:stCondLst>
+                                        </p:cTn>
+                                        <p:tgtEl>
+                                          <p:spTgt spid="3">
+                                            <p:txEl>
+                                              <p:pRg st="2" end="2"/>
+                                            </p:txEl>
+                                          </p:spTgt>
+                                        </p:tgtEl>
+                                        <p:attrNameLst>
+                                          <p:attrName>style.visibility</p:attrName>
+                                        </p:attrNameLst>
+                                      </p:cBhvr>
+                                      <p:to>
+                                        <p:strVal val="visible"/>
+                                      </p:to>
+                                    </p:set>
+                                    <p:animEffect transition="in" filter="fade">
+                                      <p:cBhvr>
+                                        <p:cTn id="12" dur="500"/>
+                                        <p:tgtEl>
+                                          <p:spTgt spid="3">
+                                            <p:txEl>
+                                              <p:pRg st="2" end="2"/>
+                                            </p:txEl>
+                                          </p:spTgt>
+                                        </p:tgtEl>
+                                      </p:cBhvr>
+                                    </p:animEffect>
+                                  </p:childTnLst>
+                                </p:cTn>
+                              </p:par>
+                            </p:childTnLst>
+                          </p:cTn>
+                        </p:par>
+                      </p:childTnLst>
+                    </p:cTn>
+                  </p:par>
+                  <p:par>
+                    <p:cTn id="13" fill="hold">
+                      <p:stCondLst>
+                        <p:cond delay="indefinite"/>
+                      </p:stCondLst>
+                      <p:childTnLst>
+                        <p:par>
+                          <p:cTn id="14" fill="hold">
+                            <p:stCondLst>
+                              <p:cond delay="0"/>
+                            </p:stCondLst>
+                            <p:childTnLst>
+                              <p:par>
+                                <p:cTn id="15" presetID="10" presetClass="entr" presetSubtype="0" fill="hold" nodeType="clickEffect">
+                                  <p:stCondLst>
+                                    <p:cond delay="0"/>
+                                  </p:stCondLst>
+                                  <p:childTnLst>
+                                    <p:set>
+                                      <p:cBhvr>
+                                        <p:cTn id="16" dur="1" fill="hold">
+                                          <p:stCondLst>
+                                            <p:cond delay="0"/>
+                                          </p:stCondLst>
+                                        </p:cTn>
+                                        <p:tgtEl>
+                                          <p:spTgt spid="3">
+                                            <p:txEl>
+                                              <p:pRg st="4" end="4"/>
+                                            </p:txEl>
+                                          </p:spTgt>
+                                        </p:tgtEl>
+                                        <p:attrNameLst>
+                                          <p:attrName>style.visibility</p:attrName>
+                                        </p:attrNameLst>
+                                      </p:cBhvr>
+                                      <p:to>
+                                        <p:strVal val="visible"/>
+                                      </p:to>
+                                    </p:set>
+                                    <p:animEffect transition="in" filter="fade">
+                                      <p:cBhvr>
+                                        <p:cTn id="17" dur="500"/>
+                                        <p:tgtEl>
+                                          <p:spTgt spid="3">
+                                            <p:txEl>
+                                              <p:pRg st="4" end="4"/>
+                                            </p:txEl>
+                                          </p:spTgt>
+                                        </p:tgtEl>
+                                      </p:cBhvr>
+                                    </p:animEffect>
+                                  </p:childTnLst>
+                                </p:cTn>
+                              </p:par>
+                            </p:childTnLst>
+                          </p:cTn>
+                        </p:par>
+                      </p:childTnLst>
+                    </p:cTn>
+                  </p:par>
+                </p:childTnLst>
+              </p:cTn>
+              <p:prevCondLst>
+                <p:cond evt="onPrev" delay="0">
+                  <p:tgtEl>
+                    <p:sldTgt/>
+                  </p:tgtEl>
+                </p:cond>
+              </p:prevCondLst>
+              <p:nextCondLst>
+                <p:cond evt="onNext" delay="0">
+                  <p:tgtEl>
+                    <p:sldTgt/>
+                  </p:tgtEl>
+                </p:cond>
+              </p:nextCondLst>
+            </p:seq>
+          </p:childTnLst>
+        </p:cTn>
+      </p:par>
+    </p:tnLst>
+  </p:timing>
 </p:sld>
 </file>
 
@@ -3477,7 +3720,15 @@
           <a:p>
             <a:r>
               <a:rPr kumimoji="1" lang="ja-JP" altLang="en-US" dirty="0" smtClean="0"/>
-              <a:t>～追加出来たら面白そう～</a:t>
+              <a:t>追加</a:t>
+            </a:r>
+            <a:r>
+              <a:rPr kumimoji="1" lang="ja-JP" altLang="en-US" dirty="0" smtClean="0"/>
+              <a:t>出来たら</a:t>
+            </a:r>
+            <a:r>
+              <a:rPr kumimoji="1" lang="ja-JP" altLang="en-US" dirty="0" smtClean="0"/>
+              <a:t>面白そう</a:t>
             </a:r>
             <a:endParaRPr kumimoji="1" lang="ja-JP" altLang="en-US" dirty="0"/>
           </a:p>
@@ -3533,6 +3784,47 @@
           </a:p>
         </p:txBody>
       </p:sp>
+      <p:pic>
+        <p:nvPicPr>
+          <p:cNvPr id="1026" name="Picture 2" descr="青色のタマゴからドラゴンアイコンイラスト - No: 22821703｜無料イラスト・フリー素材なら「イラストAC」"/>
+          <p:cNvPicPr>
+            <a:picLocks noChangeAspect="1" noChangeArrowheads="1"/>
+          </p:cNvPicPr>
+          <p:nvPr/>
+        </p:nvPicPr>
+        <p:blipFill>
+          <a:blip r:embed="rId2">
+            <a:extLst>
+              <a:ext uri="{28A0092B-C50C-407E-A947-70E740481C1C}">
+                <a14:useLocalDpi xmlns:a14="http://schemas.microsoft.com/office/drawing/2010/main" val="0"/>
+              </a:ext>
+            </a:extLst>
+          </a:blip>
+          <a:srcRect/>
+          <a:stretch>
+            <a:fillRect/>
+          </a:stretch>
+        </p:blipFill>
+        <p:spPr bwMode="auto">
+          <a:xfrm>
+            <a:off x="7186319" y="3291839"/>
+            <a:ext cx="4443937" cy="3335916"/>
+          </a:xfrm>
+          <a:prstGeom prst="rect">
+            <a:avLst/>
+          </a:prstGeom>
+          <a:noFill/>
+          <a:extLst>
+            <a:ext uri="{909E8E84-426E-40DD-AFC4-6F175D3DCCD1}">
+              <a14:hiddenFill xmlns:a14="http://schemas.microsoft.com/office/drawing/2010/main">
+                <a:solidFill>
+                  <a:srgbClr val="FFFFFF"/>
+                </a:solidFill>
+              </a14:hiddenFill>
+            </a:ext>
+          </a:extLst>
+        </p:spPr>
+      </p:pic>
     </p:spTree>
     <p:extLst>
       <p:ext uri="{BB962C8B-B14F-4D97-AF65-F5344CB8AC3E}">
@@ -3543,6 +3835,135 @@
   <p:clrMapOvr>
     <a:masterClrMapping/>
   </p:clrMapOvr>
+  <p:timing>
+    <p:tnLst>
+      <p:par>
+        <p:cTn id="1" dur="indefinite" restart="never" nodeType="tmRoot">
+          <p:childTnLst>
+            <p:seq concurrent="1" nextAc="seek">
+              <p:cTn id="2" dur="indefinite" nodeType="mainSeq">
+                <p:childTnLst>
+                  <p:par>
+                    <p:cTn id="3" fill="hold">
+                      <p:stCondLst>
+                        <p:cond delay="indefinite"/>
+                      </p:stCondLst>
+                      <p:childTnLst>
+                        <p:par>
+                          <p:cTn id="4" fill="hold">
+                            <p:stCondLst>
+                              <p:cond delay="0"/>
+                            </p:stCondLst>
+                            <p:childTnLst>
+                              <p:par>
+                                <p:cTn id="5" presetID="10" presetClass="entr" presetSubtype="0" fill="hold" grpId="0" nodeType="clickEffect">
+                                  <p:stCondLst>
+                                    <p:cond delay="0"/>
+                                  </p:stCondLst>
+                                  <p:childTnLst>
+                                    <p:set>
+                                      <p:cBhvr>
+                                        <p:cTn id="6" dur="1" fill="hold">
+                                          <p:stCondLst>
+                                            <p:cond delay="0"/>
+                                          </p:stCondLst>
+                                        </p:cTn>
+                                        <p:tgtEl>
+                                          <p:spTgt spid="3">
+                                            <p:txEl>
+                                              <p:pRg st="0" end="0"/>
+                                            </p:txEl>
+                                          </p:spTgt>
+                                        </p:tgtEl>
+                                        <p:attrNameLst>
+                                          <p:attrName>style.visibility</p:attrName>
+                                        </p:attrNameLst>
+                                      </p:cBhvr>
+                                      <p:to>
+                                        <p:strVal val="visible"/>
+                                      </p:to>
+                                    </p:set>
+                                    <p:animEffect transition="in" filter="fade">
+                                      <p:cBhvr>
+                                        <p:cTn id="7" dur="500"/>
+                                        <p:tgtEl>
+                                          <p:spTgt spid="3">
+                                            <p:txEl>
+                                              <p:pRg st="0" end="0"/>
+                                            </p:txEl>
+                                          </p:spTgt>
+                                        </p:tgtEl>
+                                      </p:cBhvr>
+                                    </p:animEffect>
+                                  </p:childTnLst>
+                                </p:cTn>
+                              </p:par>
+                              <p:par>
+                                <p:cTn id="8" presetID="10" presetClass="entr" presetSubtype="0" fill="hold" nodeType="withEffect">
+                                  <p:stCondLst>
+                                    <p:cond delay="0"/>
+                                  </p:stCondLst>
+                                  <p:childTnLst>
+                                    <p:set>
+                                      <p:cBhvr>
+                                        <p:cTn id="9" dur="1" fill="hold">
+                                          <p:stCondLst>
+                                            <p:cond delay="0"/>
+                                          </p:stCondLst>
+                                        </p:cTn>
+                                        <p:tgtEl>
+                                          <p:spTgt spid="1026"/>
+                                        </p:tgtEl>
+                                        <p:attrNameLst>
+                                          <p:attrName>style.visibility</p:attrName>
+                                        </p:attrNameLst>
+                                      </p:cBhvr>
+                                      <p:to>
+                                        <p:strVal val="visible"/>
+                                      </p:to>
+                                    </p:set>
+                                    <p:animEffect transition="in" filter="fade">
+                                      <p:cBhvr>
+                                        <p:cTn id="10" dur="500"/>
+                                        <p:tgtEl>
+                                          <p:spTgt spid="1026"/>
+                                        </p:tgtEl>
+                                      </p:cBhvr>
+                                    </p:animEffect>
+                                  </p:childTnLst>
+                                </p:cTn>
+                              </p:par>
+                            </p:childTnLst>
+                          </p:cTn>
+                        </p:par>
+                      </p:childTnLst>
+                    </p:cTn>
+                  </p:par>
+                </p:childTnLst>
+              </p:cTn>
+              <p:prevCondLst>
+                <p:cond evt="onPrev" delay="0">
+                  <p:tgtEl>
+                    <p:sldTgt/>
+                  </p:tgtEl>
+                </p:cond>
+              </p:prevCondLst>
+              <p:nextCondLst>
+                <p:cond evt="onNext" delay="0">
+                  <p:tgtEl>
+                    <p:sldTgt/>
+                  </p:tgtEl>
+                </p:cond>
+              </p:nextCondLst>
+            </p:seq>
+          </p:childTnLst>
+        </p:cTn>
+      </p:par>
+    </p:tnLst>
+    <p:bldLst>
+      <p:bldP spid="3" grpId="0" build="p"/>
+    </p:bldLst>
+  </p:timing>
 </p:sld>
 </file>
 
@@ -3598,7 +4019,9 @@
         </p:nvSpPr>
         <p:spPr/>
         <p:txBody>
-          <a:bodyPr/>
+          <a:bodyPr>
+            <a:normAutofit lnSpcReduction="10000"/>
+          </a:bodyPr>
           <a:lstStyle/>
           <a:p>
             <a:r>
@@ -3624,6 +4047,17 @@
           <a:p>
             <a:r>
               <a:rPr lang="ja-JP" altLang="en-US" dirty="0" smtClean="0"/>
+              <a:t>ダッシュ：</a:t>
+            </a:r>
+            <a:r>
+              <a:rPr lang="en-US" altLang="ja-JP" dirty="0"/>
+              <a:t>Shift</a:t>
+            </a:r>
+            <a:endParaRPr kumimoji="1" lang="en-US" altLang="ja-JP" dirty="0" smtClean="0"/>
+          </a:p>
+          <a:p>
+            <a:r>
+              <a:rPr lang="ja-JP" altLang="en-US" dirty="0" smtClean="0"/>
               <a:t>ロープ：右クリック</a:t>
             </a:r>
             <a:endParaRPr lang="en-US" altLang="ja-JP" dirty="0" smtClean="0"/>
@@ -3638,8 +4072,43 @@
           <a:p>
             <a:r>
               <a:rPr lang="ja-JP" altLang="en-US" dirty="0" smtClean="0"/>
-              <a:t>回避：コントロール</a:t>
-            </a:r>
+              <a:t>回避：</a:t>
+            </a:r>
+            <a:r>
+              <a:rPr lang="ja-JP" altLang="en-US" dirty="0" smtClean="0"/>
+              <a:t>コントロール</a:t>
+            </a:r>
+            <a:endParaRPr lang="en-US" altLang="ja-JP" dirty="0" smtClean="0"/>
+          </a:p>
+          <a:p>
+            <a:endParaRPr kumimoji="1" lang="en-US" altLang="ja-JP" dirty="0" smtClean="0"/>
+          </a:p>
+          <a:p>
+            <a:r>
+              <a:rPr lang="ja-JP" altLang="en-US" dirty="0" smtClean="0"/>
+              <a:t>ロックオン：</a:t>
+            </a:r>
+            <a:r>
+              <a:rPr lang="en-US" altLang="ja-JP" dirty="0" smtClean="0"/>
+              <a:t>R</a:t>
+            </a:r>
+          </a:p>
+          <a:p>
+            <a:r>
+              <a:rPr kumimoji="1" lang="ja-JP" altLang="en-US" dirty="0"/>
+              <a:t>視点</a:t>
+            </a:r>
+            <a:r>
+              <a:rPr kumimoji="1" lang="ja-JP" altLang="en-US" dirty="0" smtClean="0"/>
+              <a:t>切り替え：</a:t>
+            </a:r>
+            <a:r>
+              <a:rPr kumimoji="1" lang="en-US" altLang="ja-JP" dirty="0" smtClean="0"/>
+              <a:t>F</a:t>
+            </a:r>
+            <a:endParaRPr kumimoji="1" lang="en-US" altLang="ja-JP" dirty="0"/>
+          </a:p>
+          <a:p>
             <a:endParaRPr kumimoji="1" lang="en-US" altLang="ja-JP" dirty="0" smtClean="0"/>
           </a:p>
         </p:txBody>
@@ -3654,6 +4123,500 @@
   <p:clrMapOvr>
     <a:masterClrMapping/>
   </p:clrMapOvr>
+  <p:timing>
+    <p:tnLst>
+      <p:par>
+        <p:cTn id="1" dur="indefinite" restart="never" nodeType="tmRoot">
+          <p:childTnLst>
+            <p:seq concurrent="1" nextAc="seek">
+              <p:cTn id="2" dur="indefinite" nodeType="mainSeq">
+                <p:childTnLst>
+                  <p:par>
+                    <p:cTn id="3" fill="hold">
+                      <p:stCondLst>
+                        <p:cond delay="indefinite"/>
+                      </p:stCondLst>
+                      <p:childTnLst>
+                        <p:par>
+                          <p:cTn id="4" fill="hold">
+                            <p:stCondLst>
+                              <p:cond delay="0"/>
+                            </p:stCondLst>
+                            <p:childTnLst>
+                              <p:par>
+                                <p:cTn id="5" presetID="10" presetClass="entr" presetSubtype="0" fill="hold" nodeType="clickEffect">
+                                  <p:stCondLst>
+                                    <p:cond delay="0"/>
+                                  </p:stCondLst>
+                                  <p:childTnLst>
+                                    <p:set>
+                                      <p:cBhvr>
+                                        <p:cTn id="6" dur="1" fill="hold">
+                                          <p:stCondLst>
+                                            <p:cond delay="0"/>
+                                          </p:stCondLst>
+                                        </p:cTn>
+                                        <p:tgtEl>
+                                          <p:spTgt spid="3">
+                                            <p:txEl>
+                                              <p:pRg st="0" end="0"/>
+                                            </p:txEl>
+                                          </p:spTgt>
+                                        </p:tgtEl>
+                                        <p:attrNameLst>
+                                          <p:attrName>style.visibility</p:attrName>
+                                        </p:attrNameLst>
+                                      </p:cBhvr>
+                                      <p:to>
+                                        <p:strVal val="visible"/>
+                                      </p:to>
+                                    </p:set>
+                                    <p:animEffect transition="in" filter="fade">
+                                      <p:cBhvr>
+                                        <p:cTn id="7" dur="500"/>
+                                        <p:tgtEl>
+                                          <p:spTgt spid="3">
+                                            <p:txEl>
+                                              <p:pRg st="0" end="0"/>
+                                            </p:txEl>
+                                          </p:spTgt>
+                                        </p:tgtEl>
+                                      </p:cBhvr>
+                                    </p:animEffect>
+                                  </p:childTnLst>
+                                </p:cTn>
+                              </p:par>
+                              <p:par>
+                                <p:cTn id="8" presetID="10" presetClass="entr" presetSubtype="0" fill="hold" nodeType="withEffect">
+                                  <p:stCondLst>
+                                    <p:cond delay="0"/>
+                                  </p:stCondLst>
+                                  <p:childTnLst>
+                                    <p:set>
+                                      <p:cBhvr>
+                                        <p:cTn id="9" dur="1" fill="hold">
+                                          <p:stCondLst>
+                                            <p:cond delay="0"/>
+                                          </p:stCondLst>
+                                        </p:cTn>
+                                        <p:tgtEl>
+                                          <p:spTgt spid="3">
+                                            <p:txEl>
+                                              <p:pRg st="1" end="1"/>
+                                            </p:txEl>
+                                          </p:spTgt>
+                                        </p:tgtEl>
+                                        <p:attrNameLst>
+                                          <p:attrName>style.visibility</p:attrName>
+                                        </p:attrNameLst>
+                                      </p:cBhvr>
+                                      <p:to>
+                                        <p:strVal val="visible"/>
+                                      </p:to>
+                                    </p:set>
+                                    <p:animEffect transition="in" filter="fade">
+                                      <p:cBhvr>
+                                        <p:cTn id="10" dur="500"/>
+                                        <p:tgtEl>
+                                          <p:spTgt spid="3">
+                                            <p:txEl>
+                                              <p:pRg st="1" end="1"/>
+                                            </p:txEl>
+                                          </p:spTgt>
+                                        </p:tgtEl>
+                                      </p:cBhvr>
+                                    </p:animEffect>
+                                  </p:childTnLst>
+                                </p:cTn>
+                              </p:par>
+                              <p:par>
+                                <p:cTn id="11" presetID="10" presetClass="entr" presetSubtype="0" fill="hold" nodeType="withEffect">
+                                  <p:stCondLst>
+                                    <p:cond delay="0"/>
+                                  </p:stCondLst>
+                                  <p:childTnLst>
+                                    <p:set>
+                                      <p:cBhvr>
+                                        <p:cTn id="12" dur="1" fill="hold">
+                                          <p:stCondLst>
+                                            <p:cond delay="0"/>
+                                          </p:stCondLst>
+                                        </p:cTn>
+                                        <p:tgtEl>
+                                          <p:spTgt spid="3">
+                                            <p:txEl>
+                                              <p:pRg st="2" end="2"/>
+                                            </p:txEl>
+                                          </p:spTgt>
+                                        </p:tgtEl>
+                                        <p:attrNameLst>
+                                          <p:attrName>style.visibility</p:attrName>
+                                        </p:attrNameLst>
+                                      </p:cBhvr>
+                                      <p:to>
+                                        <p:strVal val="visible"/>
+                                      </p:to>
+                                    </p:set>
+                                    <p:animEffect transition="in" filter="fade">
+                                      <p:cBhvr>
+                                        <p:cTn id="13" dur="500"/>
+                                        <p:tgtEl>
+                                          <p:spTgt spid="3">
+                                            <p:txEl>
+                                              <p:pRg st="2" end="2"/>
+                                            </p:txEl>
+                                          </p:spTgt>
+                                        </p:tgtEl>
+                                      </p:cBhvr>
+                                    </p:animEffect>
+                                  </p:childTnLst>
+                                </p:cTn>
+                              </p:par>
+                            </p:childTnLst>
+                          </p:cTn>
+                        </p:par>
+                      </p:childTnLst>
+                    </p:cTn>
+                  </p:par>
+                  <p:par>
+                    <p:cTn id="14" fill="hold">
+                      <p:stCondLst>
+                        <p:cond delay="indefinite"/>
+                      </p:stCondLst>
+                      <p:childTnLst>
+                        <p:par>
+                          <p:cTn id="15" fill="hold">
+                            <p:stCondLst>
+                              <p:cond delay="0"/>
+                            </p:stCondLst>
+                            <p:childTnLst>
+                              <p:par>
+                                <p:cTn id="16" presetID="10" presetClass="entr" presetSubtype="0" fill="hold" nodeType="clickEffect">
+                                  <p:stCondLst>
+                                    <p:cond delay="0"/>
+                                  </p:stCondLst>
+                                  <p:childTnLst>
+                                    <p:set>
+                                      <p:cBhvr>
+                                        <p:cTn id="17" dur="1" fill="hold">
+                                          <p:stCondLst>
+                                            <p:cond delay="0"/>
+                                          </p:stCondLst>
+                                        </p:cTn>
+                                        <p:tgtEl>
+                                          <p:spTgt spid="3">
+                                            <p:txEl>
+                                              <p:pRg st="3" end="3"/>
+                                            </p:txEl>
+                                          </p:spTgt>
+                                        </p:tgtEl>
+                                        <p:attrNameLst>
+                                          <p:attrName>style.visibility</p:attrName>
+                                        </p:attrNameLst>
+                                      </p:cBhvr>
+                                      <p:to>
+                                        <p:strVal val="visible"/>
+                                      </p:to>
+                                    </p:set>
+                                    <p:animEffect transition="in" filter="fade">
+                                      <p:cBhvr>
+                                        <p:cTn id="18" dur="500"/>
+                                        <p:tgtEl>
+                                          <p:spTgt spid="3">
+                                            <p:txEl>
+                                              <p:pRg st="3" end="3"/>
+                                            </p:txEl>
+                                          </p:spTgt>
+                                        </p:tgtEl>
+                                      </p:cBhvr>
+                                    </p:animEffect>
+                                  </p:childTnLst>
+                                </p:cTn>
+                              </p:par>
+                              <p:par>
+                                <p:cTn id="19" presetID="10" presetClass="entr" presetSubtype="0" fill="hold" nodeType="withEffect">
+                                  <p:stCondLst>
+                                    <p:cond delay="0"/>
+                                  </p:stCondLst>
+                                  <p:childTnLst>
+                                    <p:set>
+                                      <p:cBhvr>
+                                        <p:cTn id="20" dur="1" fill="hold">
+                                          <p:stCondLst>
+                                            <p:cond delay="0"/>
+                                          </p:stCondLst>
+                                        </p:cTn>
+                                        <p:tgtEl>
+                                          <p:spTgt spid="3">
+                                            <p:txEl>
+                                              <p:pRg st="4" end="4"/>
+                                            </p:txEl>
+                                          </p:spTgt>
+                                        </p:tgtEl>
+                                        <p:attrNameLst>
+                                          <p:attrName>style.visibility</p:attrName>
+                                        </p:attrNameLst>
+                                      </p:cBhvr>
+                                      <p:to>
+                                        <p:strVal val="visible"/>
+                                      </p:to>
+                                    </p:set>
+                                    <p:animEffect transition="in" filter="fade">
+                                      <p:cBhvr>
+                                        <p:cTn id="21" dur="500"/>
+                                        <p:tgtEl>
+                                          <p:spTgt spid="3">
+                                            <p:txEl>
+                                              <p:pRg st="4" end="4"/>
+                                            </p:txEl>
+                                          </p:spTgt>
+                                        </p:tgtEl>
+                                      </p:cBhvr>
+                                    </p:animEffect>
+                                  </p:childTnLst>
+                                </p:cTn>
+                              </p:par>
+                              <p:par>
+                                <p:cTn id="22" presetID="10" presetClass="entr" presetSubtype="0" fill="hold" nodeType="withEffect">
+                                  <p:stCondLst>
+                                    <p:cond delay="0"/>
+                                  </p:stCondLst>
+                                  <p:childTnLst>
+                                    <p:set>
+                                      <p:cBhvr>
+                                        <p:cTn id="23" dur="1" fill="hold">
+                                          <p:stCondLst>
+                                            <p:cond delay="0"/>
+                                          </p:stCondLst>
+                                        </p:cTn>
+                                        <p:tgtEl>
+                                          <p:spTgt spid="3">
+                                            <p:txEl>
+                                              <p:pRg st="5" end="5"/>
+                                            </p:txEl>
+                                          </p:spTgt>
+                                        </p:tgtEl>
+                                        <p:attrNameLst>
+                                          <p:attrName>style.visibility</p:attrName>
+                                        </p:attrNameLst>
+                                      </p:cBhvr>
+                                      <p:to>
+                                        <p:strVal val="visible"/>
+                                      </p:to>
+                                    </p:set>
+                                    <p:animEffect transition="in" filter="fade">
+                                      <p:cBhvr>
+                                        <p:cTn id="24" dur="500"/>
+                                        <p:tgtEl>
+                                          <p:spTgt spid="3">
+                                            <p:txEl>
+                                              <p:pRg st="5" end="5"/>
+                                            </p:txEl>
+                                          </p:spTgt>
+                                        </p:tgtEl>
+                                      </p:cBhvr>
+                                    </p:animEffect>
+                                  </p:childTnLst>
+                                </p:cTn>
+                              </p:par>
+                            </p:childTnLst>
+                          </p:cTn>
+                        </p:par>
+                      </p:childTnLst>
+                    </p:cTn>
+                  </p:par>
+                  <p:par>
+                    <p:cTn id="25" fill="hold">
+                      <p:stCondLst>
+                        <p:cond delay="indefinite"/>
+                      </p:stCondLst>
+                      <p:childTnLst>
+                        <p:par>
+                          <p:cTn id="26" fill="hold">
+                            <p:stCondLst>
+                              <p:cond delay="0"/>
+                            </p:stCondLst>
+                            <p:childTnLst>
+                              <p:par>
+                                <p:cTn id="27" presetID="10" presetClass="entr" presetSubtype="0" fill="hold" nodeType="clickEffect">
+                                  <p:stCondLst>
+                                    <p:cond delay="0"/>
+                                  </p:stCondLst>
+                                  <p:childTnLst>
+                                    <p:set>
+                                      <p:cBhvr>
+                                        <p:cTn id="28" dur="1" fill="hold">
+                                          <p:stCondLst>
+                                            <p:cond delay="0"/>
+                                          </p:stCondLst>
+                                        </p:cTn>
+                                        <p:tgtEl>
+                                          <p:spTgt spid="3">
+                                            <p:txEl>
+                                              <p:pRg st="7" end="7"/>
+                                            </p:txEl>
+                                          </p:spTgt>
+                                        </p:tgtEl>
+                                        <p:attrNameLst>
+                                          <p:attrName>style.visibility</p:attrName>
+                                        </p:attrNameLst>
+                                      </p:cBhvr>
+                                      <p:to>
+                                        <p:strVal val="visible"/>
+                                      </p:to>
+                                    </p:set>
+                                    <p:animEffect transition="in" filter="fade">
+                                      <p:cBhvr>
+                                        <p:cTn id="29" dur="500"/>
+                                        <p:tgtEl>
+                                          <p:spTgt spid="3">
+                                            <p:txEl>
+                                              <p:pRg st="7" end="7"/>
+                                            </p:txEl>
+                                          </p:spTgt>
+                                        </p:tgtEl>
+                                      </p:cBhvr>
+                                    </p:animEffect>
+                                  </p:childTnLst>
+                                </p:cTn>
+                              </p:par>
+                              <p:par>
+                                <p:cTn id="30" presetID="10" presetClass="entr" presetSubtype="0" fill="hold" nodeType="withEffect">
+                                  <p:stCondLst>
+                                    <p:cond delay="0"/>
+                                  </p:stCondLst>
+                                  <p:childTnLst>
+                                    <p:set>
+                                      <p:cBhvr>
+                                        <p:cTn id="31" dur="1" fill="hold">
+                                          <p:stCondLst>
+                                            <p:cond delay="0"/>
+                                          </p:stCondLst>
+                                        </p:cTn>
+                                        <p:tgtEl>
+                                          <p:spTgt spid="3">
+                                            <p:txEl>
+                                              <p:pRg st="8" end="8"/>
+                                            </p:txEl>
+                                          </p:spTgt>
+                                        </p:tgtEl>
+                                        <p:attrNameLst>
+                                          <p:attrName>style.visibility</p:attrName>
+                                        </p:attrNameLst>
+                                      </p:cBhvr>
+                                      <p:to>
+                                        <p:strVal val="visible"/>
+                                      </p:to>
+                                    </p:set>
+                                    <p:animEffect transition="in" filter="fade">
+                                      <p:cBhvr>
+                                        <p:cTn id="32" dur="500"/>
+                                        <p:tgtEl>
+                                          <p:spTgt spid="3">
+                                            <p:txEl>
+                                              <p:pRg st="8" end="8"/>
+                                            </p:txEl>
+                                          </p:spTgt>
+                                        </p:tgtEl>
+                                      </p:cBhvr>
+                                    </p:animEffect>
+                                  </p:childTnLst>
+                                </p:cTn>
+                              </p:par>
+                            </p:childTnLst>
+                          </p:cTn>
+                        </p:par>
+                      </p:childTnLst>
+                    </p:cTn>
+                  </p:par>
+                </p:childTnLst>
+              </p:cTn>
+              <p:prevCondLst>
+                <p:cond evt="onPrev" delay="0">
+                  <p:tgtEl>
+                    <p:sldTgt/>
+                  </p:tgtEl>
+                </p:cond>
+              </p:prevCondLst>
+              <p:nextCondLst>
+                <p:cond evt="onNext" delay="0">
+                  <p:tgtEl>
+                    <p:sldTgt/>
+                  </p:tgtEl>
+                </p:cond>
+              </p:nextCondLst>
+            </p:seq>
+          </p:childTnLst>
+        </p:cTn>
+      </p:par>
+    </p:tnLst>
+  </p:timing>
+</p:sld>
+</file>
+
+<file path=ppt/slides/slide5.xml><?xml version="1.0" encoding="utf-8"?>
+<p:sld xmlns:a="http://schemas.openxmlformats.org/drawingml/2006/main" xmlns:r="http://schemas.openxmlformats.org/officeDocument/2006/relationships" xmlns:p="http://schemas.openxmlformats.org/presentationml/2006/main">
+  <p:cSld>
+    <p:spTree>
+      <p:nvGrpSpPr>
+        <p:cNvPr id="1" name=""/>
+        <p:cNvGrpSpPr/>
+        <p:nvPr/>
+      </p:nvGrpSpPr>
+      <p:grpSpPr>
+        <a:xfrm>
+          <a:off x="0" y="0"/>
+          <a:ext cx="0" cy="0"/>
+          <a:chOff x="0" y="0"/>
+          <a:chExt cx="0" cy="0"/>
+        </a:xfrm>
+      </p:grpSpPr>
+      <p:sp>
+        <p:nvSpPr>
+          <p:cNvPr id="2" name="タイトル 1"/>
+          <p:cNvSpPr>
+            <a:spLocks noGrp="1"/>
+          </p:cNvSpPr>
+          <p:nvPr>
+            <p:ph type="title"/>
+          </p:nvPr>
+        </p:nvSpPr>
+        <p:spPr>
+          <a:xfrm>
+            <a:off x="1004454" y="2725939"/>
+            <a:ext cx="10515600" cy="1325563"/>
+          </a:xfrm>
+        </p:spPr>
+        <p:txBody>
+          <a:bodyPr/>
+          <a:lstStyle/>
+          <a:p>
+            <a:pPr algn="ctr"/>
+            <a:r>
+              <a:rPr kumimoji="1" lang="ja-JP" altLang="en-US" dirty="0" smtClean="0"/>
+              <a:t>ご清聴ありがとうございました。</a:t>
+            </a:r>
+            <a:endParaRPr kumimoji="1" lang="ja-JP" altLang="en-US" dirty="0"/>
+          </a:p>
+        </p:txBody>
+      </p:sp>
+    </p:spTree>
+    <p:extLst>
+      <p:ext uri="{BB962C8B-B14F-4D97-AF65-F5344CB8AC3E}">
+        <p14:creationId xmlns:p14="http://schemas.microsoft.com/office/powerpoint/2010/main" val="879018791"/>
+      </p:ext>
+    </p:extLst>
+  </p:cSld>
+  <p:clrMapOvr>
+    <a:masterClrMapping/>
+  </p:clrMapOvr>
+  <p:timing>
+    <p:tnLst>
+      <p:par>
+        <p:cTn id="1" dur="indefinite" restart="never" nodeType="tmRoot"/>
+      </p:par>
+    </p:tnLst>
+  </p:timing>
 </p:sld>
 </file>
 
